--- a/dist/초5/영어/말하기와쓰기/초5_영어_말하기와쓰기_01_하루일과말하기.pptx
+++ b/dist/초5/영어/말하기와쓰기/초5_영어_말하기와쓰기_01_하루일과말하기.pptx
@@ -121,13 +121,13 @@
   <p:extLst>
     <p:ext uri="{521415D9-36F7-43E2-AB2F-B90AF26B5E84}">
       <p14:sectionLst xmlns:p14="http://schemas.microsoft.com/office/powerpoint/2010/main">
-        <p14:section name="도입" id="{5cc703b5-c288-a84c-3efc-e2dbaa3bbf27}">
+        <p14:section name="도입" id="{97773338-ec5f-e328-8317-f06f46cd6611}">
           <p14:sldIdLst>
             <p14:sldId id="256"/>
             <p14:sldId id="257"/>
           </p14:sldIdLst>
         </p14:section>
-        <p14:section name="개념" id="{08aab7d2-98de-afa9-95b8-034b1b37dd82}">
+        <p14:section name="개념" id="{af5db49b-4d23-20c3-81a2-97cd287bacb2}">
           <p14:sldIdLst>
             <p14:sldId id="258"/>
             <p14:sldId id="259"/>
@@ -136,32 +136,32 @@
             <p14:sldId id="264"/>
           </p14:sldIdLst>
         </p14:section>
-        <p14:section name="연습" id="{6b752e9a-e971-b9c7-069b-2f0fa21d754b}">
+        <p14:section name="연습" id="{b5da2a3f-6c80-5792-7f19-e12f1dba9c16}">
           <p14:sldIdLst>
             <p14:sldId id="262"/>
             <p14:sldId id="263"/>
             <p14:sldId id="265"/>
           </p14:sldIdLst>
         </p14:section>
-        <p14:section name="개념" id="{0a237c6c-9870-2f9a-04a9-480d3627524b}">
+        <p14:section name="개념" id="{c6313d5b-3b29-d9a9-8ada-3687dc942ae4}">
           <p14:sldIdLst/>
         </p14:section>
-        <p14:section name="연습" id="{ed6d972e-130f-8b61-53db-6f9f2eeafbb8}">
+        <p14:section name="연습" id="{2fd40a17-6569-82df-8b1f-4912dbab68db}">
           <p14:sldIdLst/>
         </p14:section>
-        <p14:section name="확인" id="{515aa4c1-327d-45a3-07a9-b8a0230d397a}">
+        <p14:section name="확인" id="{7d3b8fb2-7a46-622b-010c-980272e0e23b}">
           <p14:sldIdLst>
             <p14:sldId id="266"/>
             <p14:sldId id="267"/>
             <p14:sldId id="268"/>
           </p14:sldIdLst>
         </p14:section>
-        <p14:section name="정리" id="{2f896223-03f0-a440-3d63-5c239adf5114}">
+        <p14:section name="정리" id="{c9306468-501f-311c-bbf9-8a4c23b9df2c}">
           <p14:sldIdLst>
             <p14:sldId id="269"/>
           </p14:sldIdLst>
         </p14:section>
-        <p14:section name="보충" id="{fa34546e-4938-477e-ba94-bed3bf74f56f}">
+        <p14:section name="보충" id="{34f473d6-c1da-ba35-4ab3-7bae7b3d955f}">
           <p14:sldIdLst>
             <p14:sldId id="270"/>
           </p14:sldIdLst>

--- a/dist/초5/영어/말하기와쓰기/초5_영어_말하기와쓰기_01_하루일과말하기.pptx
+++ b/dist/초5/영어/말하기와쓰기/초5_영어_말하기와쓰기_01_하루일과말하기.pptx
@@ -121,13 +121,13 @@
   <p:extLst>
     <p:ext uri="{521415D9-36F7-43E2-AB2F-B90AF26B5E84}">
       <p14:sectionLst xmlns:p14="http://schemas.microsoft.com/office/powerpoint/2010/main">
-        <p14:section name="도입" id="{97773338-ec5f-e328-8317-f06f46cd6611}">
+        <p14:section name="도입" id="{3bef9f4b-4035-5e6c-d0dc-3220328f41bd}">
           <p14:sldIdLst>
             <p14:sldId id="256"/>
             <p14:sldId id="257"/>
           </p14:sldIdLst>
         </p14:section>
-        <p14:section name="개념" id="{af5db49b-4d23-20c3-81a2-97cd287bacb2}">
+        <p14:section name="개념" id="{6eb5e17f-e1d7-7a8f-87c8-1fbf529ed2e3}">
           <p14:sldIdLst>
             <p14:sldId id="258"/>
             <p14:sldId id="259"/>
@@ -136,32 +136,32 @@
             <p14:sldId id="264"/>
           </p14:sldIdLst>
         </p14:section>
-        <p14:section name="연습" id="{b5da2a3f-6c80-5792-7f19-e12f1dba9c16}">
+        <p14:section name="연습" id="{f99a8596-296b-4633-af88-136bc8b42541}">
           <p14:sldIdLst>
             <p14:sldId id="262"/>
             <p14:sldId id="263"/>
             <p14:sldId id="265"/>
           </p14:sldIdLst>
         </p14:section>
-        <p14:section name="개념" id="{c6313d5b-3b29-d9a9-8ada-3687dc942ae4}">
+        <p14:section name="개념" id="{95e35a0e-dacf-d922-87cb-b455c97ba8f7}">
           <p14:sldIdLst/>
         </p14:section>
-        <p14:section name="연습" id="{2fd40a17-6569-82df-8b1f-4912dbab68db}">
+        <p14:section name="연습" id="{fe02f3e0-21d1-b0df-89ec-efa0d531c787}">
           <p14:sldIdLst/>
         </p14:section>
-        <p14:section name="확인" id="{7d3b8fb2-7a46-622b-010c-980272e0e23b}">
+        <p14:section name="확인" id="{ac68170d-817d-f6cd-2aa9-beda03ee6e87}">
           <p14:sldIdLst>
             <p14:sldId id="266"/>
             <p14:sldId id="267"/>
             <p14:sldId id="268"/>
           </p14:sldIdLst>
         </p14:section>
-        <p14:section name="정리" id="{c9306468-501f-311c-bbf9-8a4c23b9df2c}">
+        <p14:section name="정리" id="{9fd98eb4-8592-5f90-7559-b15645b74df9}">
           <p14:sldIdLst>
             <p14:sldId id="269"/>
           </p14:sldIdLst>
         </p14:section>
-        <p14:section name="보충" id="{34f473d6-c1da-ba35-4ab3-7bae7b3d955f}">
+        <p14:section name="보충" id="{944fa802-f30d-eba3-ef84-df36b4081104}">
           <p14:sldIdLst>
             <p14:sldId id="270"/>
           </p14:sldIdLst>
@@ -1266,7 +1266,7 @@
             <a:r>
               <a:rPr lang="en-US" dirty="0"/>
               <a:t>[S02 · 선수 학습 확인(정각 시각 말하기)]
-목적: 일과 문장에 넣을 시각(정각)을 영어로 말할 수 있는지 확인합니다. 이 차시는 계획상 앞 차시가 없으므로, 4학년 ‘시각 묻고 답하기’에서 익힌 정각 말하기를 확인합니다.
+목적: 일과 문장에 넣을 시각(정각)을 영어로 말할 수 있는지 확인합니다. 앞 차시인 4학년 ‘시각 묻고 답하기’에서 익힌 정각 말하기를 확인합니다.
 시간: 약 3분
 이렇게 말해 보세요
 - “①은 몇 시야? 영어로 말해 볼래? 엄마(아빠)가 물어볼게. What time is it?”
